--- a/docs/pptx/whole/ritu-cox-linear-ratio-death_10pct.pptx
+++ b/docs/pptx/whole/ritu-cox-linear-ratio-death_10pct.pptx
@@ -2443,7 +2443,7 @@
           </p:nvSpPr>
           <p:spPr>
             <a:xfrm>
-              <a:off x="955490" y="2073503"/>
+              <a:off x="957589" y="2073503"/>
               <a:ext cx="0" cy="3649639"/>
             </a:xfrm>
             <a:custGeom>
@@ -2486,7 +2486,7 @@
           </p:nvSpPr>
           <p:spPr>
             <a:xfrm>
-              <a:off x="1892768" y="2073503"/>
+              <a:off x="1893867" y="2073503"/>
               <a:ext cx="0" cy="3649639"/>
             </a:xfrm>
             <a:custGeom>
@@ -2529,7 +2529,7 @@
           </p:nvSpPr>
           <p:spPr>
             <a:xfrm>
-              <a:off x="2830046" y="2073503"/>
+              <a:off x="2830144" y="2073503"/>
               <a:ext cx="0" cy="3649639"/>
             </a:xfrm>
             <a:custGeom>
@@ -2572,7 +2572,7 @@
           </p:nvSpPr>
           <p:spPr>
             <a:xfrm>
-              <a:off x="3767323" y="2073503"/>
+              <a:off x="3766422" y="2073503"/>
               <a:ext cx="0" cy="3649639"/>
             </a:xfrm>
             <a:custGeom>
@@ -2615,7 +2615,7 @@
           </p:nvSpPr>
           <p:spPr>
             <a:xfrm>
-              <a:off x="4704601" y="2073503"/>
+              <a:off x="4702700" y="2073503"/>
               <a:ext cx="0" cy="3649639"/>
             </a:xfrm>
             <a:custGeom>
@@ -2658,7 +2658,7 @@
           </p:nvSpPr>
           <p:spPr>
             <a:xfrm>
-              <a:off x="5641878" y="2073503"/>
+              <a:off x="5638978" y="2073503"/>
               <a:ext cx="0" cy="3649639"/>
             </a:xfrm>
             <a:custGeom>
@@ -2701,7 +2701,7 @@
           </p:nvSpPr>
           <p:spPr>
             <a:xfrm>
-              <a:off x="6579156" y="2073503"/>
+              <a:off x="6575256" y="2073503"/>
               <a:ext cx="0" cy="3649639"/>
             </a:xfrm>
             <a:custGeom>
@@ -2744,7 +2744,7 @@
           </p:nvSpPr>
           <p:spPr>
             <a:xfrm>
-              <a:off x="7516433" y="2073503"/>
+              <a:off x="7511534" y="2073503"/>
               <a:ext cx="0" cy="3649639"/>
             </a:xfrm>
             <a:custGeom>
@@ -2787,7 +2787,7 @@
           </p:nvSpPr>
           <p:spPr>
             <a:xfrm>
-              <a:off x="8453711" y="2073503"/>
+              <a:off x="8447812" y="2073503"/>
               <a:ext cx="0" cy="3649639"/>
             </a:xfrm>
             <a:custGeom>
@@ -3045,7 +3045,7 @@
           </p:nvSpPr>
           <p:spPr>
             <a:xfrm>
-              <a:off x="1424129" y="2073503"/>
+              <a:off x="1425728" y="2073503"/>
               <a:ext cx="0" cy="3649639"/>
             </a:xfrm>
             <a:custGeom>
@@ -3088,7 +3088,7 @@
           </p:nvSpPr>
           <p:spPr>
             <a:xfrm>
-              <a:off x="2361407" y="2073503"/>
+              <a:off x="2362006" y="2073503"/>
               <a:ext cx="0" cy="3649639"/>
             </a:xfrm>
             <a:custGeom>
@@ -3131,7 +3131,7 @@
           </p:nvSpPr>
           <p:spPr>
             <a:xfrm>
-              <a:off x="3298684" y="2073503"/>
+              <a:off x="3298283" y="2073503"/>
               <a:ext cx="0" cy="3649639"/>
             </a:xfrm>
             <a:custGeom>
@@ -3174,7 +3174,7 @@
           </p:nvSpPr>
           <p:spPr>
             <a:xfrm>
-              <a:off x="4235962" y="2073503"/>
+              <a:off x="4234561" y="2073503"/>
               <a:ext cx="0" cy="3649639"/>
             </a:xfrm>
             <a:custGeom>
@@ -3217,7 +3217,7 @@
           </p:nvSpPr>
           <p:spPr>
             <a:xfrm>
-              <a:off x="5173239" y="2073503"/>
+              <a:off x="5170839" y="2073503"/>
               <a:ext cx="0" cy="3649639"/>
             </a:xfrm>
             <a:custGeom>
@@ -3260,7 +3260,7 @@
           </p:nvSpPr>
           <p:spPr>
             <a:xfrm>
-              <a:off x="6110517" y="2073503"/>
+              <a:off x="6107117" y="2073503"/>
               <a:ext cx="0" cy="3649639"/>
             </a:xfrm>
             <a:custGeom>
@@ -3303,7 +3303,7 @@
           </p:nvSpPr>
           <p:spPr>
             <a:xfrm>
-              <a:off x="7047795" y="2073503"/>
+              <a:off x="7043395" y="2073503"/>
               <a:ext cx="0" cy="3649639"/>
             </a:xfrm>
             <a:custGeom>
@@ -3346,7 +3346,7 @@
           </p:nvSpPr>
           <p:spPr>
             <a:xfrm>
-              <a:off x="7985072" y="2073503"/>
+              <a:off x="7979673" y="2073503"/>
               <a:ext cx="0" cy="3649639"/>
             </a:xfrm>
             <a:custGeom>
@@ -3508,6 +3508,15 @@
                     <a:pt x="2578410" y="0"/>
                   </a:lnTo>
                   <a:lnTo>
+                    <a:pt x="2650033" y="0"/>
+                  </a:lnTo>
+                  <a:lnTo>
+                    <a:pt x="3581126" y="0"/>
+                  </a:lnTo>
+                  <a:lnTo>
+                    <a:pt x="3652748" y="0"/>
+                  </a:lnTo>
+                  <a:lnTo>
                     <a:pt x="3724371" y="0"/>
                   </a:lnTo>
                   <a:lnTo>
@@ -3817,7 +3826,7 @@
                     <a:pt x="3223013" y="3483746"/>
                   </a:lnTo>
                   <a:lnTo>
-                    <a:pt x="3151391" y="3483745"/>
+                    <a:pt x="3151391" y="3483746"/>
                   </a:lnTo>
                   <a:lnTo>
                     <a:pt x="3079768" y="3483746"/>
@@ -3976,12 +3985,12 @@
           <p:spPr>
             <a:xfrm>
               <a:off x="1172049" y="2073503"/>
-              <a:ext cx="2578410" cy="0"/>
+              <a:ext cx="2650033" cy="0"/>
             </a:xfrm>
             <a:custGeom>
               <a:avLst/>
               <a:pathLst>
-                <a:path w="2578410" h="0">
+                <a:path w="2650033" h="0">
                   <a:moveTo>
                     <a:pt x="0" y="0"/>
                   </a:moveTo>
@@ -4092,6 +4101,9 @@
                   </a:lnTo>
                   <a:lnTo>
                     <a:pt x="2578410" y="0"/>
+                  </a:lnTo>
+                  <a:lnTo>
+                    <a:pt x="2650033" y="0"/>
                   </a:lnTo>
                 </a:path>
               </a:pathLst>
@@ -4111,13 +4123,13 @@
           </p:nvSpPr>
           <p:spPr>
             <a:xfrm>
-              <a:off x="4896420" y="2073503"/>
-              <a:ext cx="3366258" cy="0"/>
+              <a:off x="4753175" y="2073503"/>
+              <a:ext cx="3509503" cy="0"/>
             </a:xfrm>
             <a:custGeom>
               <a:avLst/>
               <a:pathLst>
-                <a:path w="3366258" h="0">
+                <a:path w="3509503" h="0">
                   <a:moveTo>
                     <a:pt x="0" y="0"/>
                   </a:moveTo>
@@ -4264,6 +4276,12 @@
                   </a:lnTo>
                   <a:lnTo>
                     <a:pt x="3366258" y="0"/>
+                  </a:lnTo>
+                  <a:lnTo>
+                    <a:pt x="3437881" y="0"/>
+                  </a:lnTo>
+                  <a:lnTo>
+                    <a:pt x="3509503" y="0"/>
                   </a:lnTo>
                 </a:path>
               </a:pathLst>
@@ -4283,312 +4301,312 @@
           </p:nvSpPr>
           <p:spPr>
             <a:xfrm>
-              <a:off x="1172049" y="5557248"/>
-              <a:ext cx="7090630" cy="1"/>
+              <a:off x="1172049" y="5557249"/>
+              <a:ext cx="7090630" cy="0"/>
             </a:xfrm>
             <a:custGeom>
               <a:avLst/>
               <a:pathLst>
-                <a:path w="7090630" h="1">
+                <a:path w="7090630" h="0">
                   <a:moveTo>
-                    <a:pt x="7090630" y="1"/>
+                    <a:pt x="7090630" y="0"/>
                   </a:moveTo>
                   <a:lnTo>
-                    <a:pt x="7019007" y="1"/>
-                  </a:lnTo>
-                  <a:lnTo>
-                    <a:pt x="6947385" y="1"/>
-                  </a:lnTo>
-                  <a:lnTo>
-                    <a:pt x="6875762" y="1"/>
-                  </a:lnTo>
-                  <a:lnTo>
-                    <a:pt x="6804139" y="1"/>
-                  </a:lnTo>
-                  <a:lnTo>
-                    <a:pt x="6732517" y="1"/>
-                  </a:lnTo>
-                  <a:lnTo>
-                    <a:pt x="6660894" y="1"/>
-                  </a:lnTo>
-                  <a:lnTo>
-                    <a:pt x="6589272" y="1"/>
-                  </a:lnTo>
-                  <a:lnTo>
-                    <a:pt x="6517649" y="1"/>
-                  </a:lnTo>
-                  <a:lnTo>
-                    <a:pt x="6446027" y="1"/>
-                  </a:lnTo>
-                  <a:lnTo>
-                    <a:pt x="6374404" y="1"/>
-                  </a:lnTo>
-                  <a:lnTo>
-                    <a:pt x="6302782" y="1"/>
-                  </a:lnTo>
-                  <a:lnTo>
-                    <a:pt x="6231159" y="1"/>
-                  </a:lnTo>
-                  <a:lnTo>
-                    <a:pt x="6159537" y="1"/>
-                  </a:lnTo>
-                  <a:lnTo>
-                    <a:pt x="6087914" y="1"/>
-                  </a:lnTo>
-                  <a:lnTo>
-                    <a:pt x="6016292" y="1"/>
-                  </a:lnTo>
-                  <a:lnTo>
-                    <a:pt x="5944669" y="1"/>
-                  </a:lnTo>
-                  <a:lnTo>
-                    <a:pt x="5873047" y="1"/>
-                  </a:lnTo>
-                  <a:lnTo>
-                    <a:pt x="5801424" y="1"/>
-                  </a:lnTo>
-                  <a:lnTo>
-                    <a:pt x="5729802" y="1"/>
-                  </a:lnTo>
-                  <a:lnTo>
-                    <a:pt x="5658179" y="1"/>
-                  </a:lnTo>
-                  <a:lnTo>
-                    <a:pt x="5586557" y="1"/>
-                  </a:lnTo>
-                  <a:lnTo>
-                    <a:pt x="5514934" y="1"/>
-                  </a:lnTo>
-                  <a:lnTo>
-                    <a:pt x="5443311" y="1"/>
-                  </a:lnTo>
-                  <a:lnTo>
-                    <a:pt x="5371689" y="1"/>
-                  </a:lnTo>
-                  <a:lnTo>
-                    <a:pt x="5300066" y="1"/>
-                  </a:lnTo>
-                  <a:lnTo>
-                    <a:pt x="5228444" y="1"/>
-                  </a:lnTo>
-                  <a:lnTo>
-                    <a:pt x="5156821" y="1"/>
-                  </a:lnTo>
-                  <a:lnTo>
-                    <a:pt x="5085199" y="1"/>
-                  </a:lnTo>
-                  <a:lnTo>
-                    <a:pt x="5013576" y="1"/>
-                  </a:lnTo>
-                  <a:lnTo>
-                    <a:pt x="4941954" y="1"/>
-                  </a:lnTo>
-                  <a:lnTo>
-                    <a:pt x="4870331" y="1"/>
-                  </a:lnTo>
-                  <a:lnTo>
-                    <a:pt x="4798709" y="1"/>
-                  </a:lnTo>
-                  <a:lnTo>
-                    <a:pt x="4727086" y="1"/>
-                  </a:lnTo>
-                  <a:lnTo>
-                    <a:pt x="4655464" y="1"/>
-                  </a:lnTo>
-                  <a:lnTo>
-                    <a:pt x="4583841" y="1"/>
-                  </a:lnTo>
-                  <a:lnTo>
-                    <a:pt x="4512219" y="1"/>
-                  </a:lnTo>
-                  <a:lnTo>
-                    <a:pt x="4440596" y="1"/>
-                  </a:lnTo>
-                  <a:lnTo>
-                    <a:pt x="4368974" y="1"/>
-                  </a:lnTo>
-                  <a:lnTo>
-                    <a:pt x="4297351" y="1"/>
-                  </a:lnTo>
-                  <a:lnTo>
-                    <a:pt x="4225729" y="1"/>
-                  </a:lnTo>
-                  <a:lnTo>
-                    <a:pt x="4154106" y="1"/>
-                  </a:lnTo>
-                  <a:lnTo>
-                    <a:pt x="4082483" y="1"/>
-                  </a:lnTo>
-                  <a:lnTo>
-                    <a:pt x="4010861" y="1"/>
-                  </a:lnTo>
-                  <a:lnTo>
-                    <a:pt x="3939238" y="1"/>
-                  </a:lnTo>
-                  <a:lnTo>
-                    <a:pt x="3867616" y="1"/>
-                  </a:lnTo>
-                  <a:lnTo>
-                    <a:pt x="3795993" y="1"/>
-                  </a:lnTo>
-                  <a:lnTo>
-                    <a:pt x="3724371" y="1"/>
-                  </a:lnTo>
-                  <a:lnTo>
-                    <a:pt x="3652748" y="1"/>
-                  </a:lnTo>
-                  <a:lnTo>
-                    <a:pt x="3581126" y="1"/>
-                  </a:lnTo>
-                  <a:lnTo>
-                    <a:pt x="3509503" y="1"/>
-                  </a:lnTo>
-                  <a:lnTo>
-                    <a:pt x="3437881" y="1"/>
-                  </a:lnTo>
-                  <a:lnTo>
-                    <a:pt x="3366258" y="1"/>
-                  </a:lnTo>
-                  <a:lnTo>
-                    <a:pt x="3294636" y="1"/>
-                  </a:lnTo>
-                  <a:lnTo>
-                    <a:pt x="3223013" y="1"/>
+                    <a:pt x="7019007" y="0"/>
+                  </a:lnTo>
+                  <a:lnTo>
+                    <a:pt x="6947385" y="0"/>
+                  </a:lnTo>
+                  <a:lnTo>
+                    <a:pt x="6875762" y="0"/>
+                  </a:lnTo>
+                  <a:lnTo>
+                    <a:pt x="6804139" y="0"/>
+                  </a:lnTo>
+                  <a:lnTo>
+                    <a:pt x="6732517" y="0"/>
+                  </a:lnTo>
+                  <a:lnTo>
+                    <a:pt x="6660894" y="0"/>
+                  </a:lnTo>
+                  <a:lnTo>
+                    <a:pt x="6589272" y="0"/>
+                  </a:lnTo>
+                  <a:lnTo>
+                    <a:pt x="6517649" y="0"/>
+                  </a:lnTo>
+                  <a:lnTo>
+                    <a:pt x="6446027" y="0"/>
+                  </a:lnTo>
+                  <a:lnTo>
+                    <a:pt x="6374404" y="0"/>
+                  </a:lnTo>
+                  <a:lnTo>
+                    <a:pt x="6302782" y="0"/>
+                  </a:lnTo>
+                  <a:lnTo>
+                    <a:pt x="6231159" y="0"/>
+                  </a:lnTo>
+                  <a:lnTo>
+                    <a:pt x="6159537" y="0"/>
+                  </a:lnTo>
+                  <a:lnTo>
+                    <a:pt x="6087914" y="0"/>
+                  </a:lnTo>
+                  <a:lnTo>
+                    <a:pt x="6016292" y="0"/>
+                  </a:lnTo>
+                  <a:lnTo>
+                    <a:pt x="5944669" y="0"/>
+                  </a:lnTo>
+                  <a:lnTo>
+                    <a:pt x="5873047" y="0"/>
+                  </a:lnTo>
+                  <a:lnTo>
+                    <a:pt x="5801424" y="0"/>
+                  </a:lnTo>
+                  <a:lnTo>
+                    <a:pt x="5729802" y="0"/>
+                  </a:lnTo>
+                  <a:lnTo>
+                    <a:pt x="5658179" y="0"/>
+                  </a:lnTo>
+                  <a:lnTo>
+                    <a:pt x="5586557" y="0"/>
+                  </a:lnTo>
+                  <a:lnTo>
+                    <a:pt x="5514934" y="0"/>
+                  </a:lnTo>
+                  <a:lnTo>
+                    <a:pt x="5443311" y="0"/>
+                  </a:lnTo>
+                  <a:lnTo>
+                    <a:pt x="5371689" y="0"/>
+                  </a:lnTo>
+                  <a:lnTo>
+                    <a:pt x="5300066" y="0"/>
+                  </a:lnTo>
+                  <a:lnTo>
+                    <a:pt x="5228444" y="0"/>
+                  </a:lnTo>
+                  <a:lnTo>
+                    <a:pt x="5156821" y="0"/>
+                  </a:lnTo>
+                  <a:lnTo>
+                    <a:pt x="5085199" y="0"/>
+                  </a:lnTo>
+                  <a:lnTo>
+                    <a:pt x="5013576" y="0"/>
+                  </a:lnTo>
+                  <a:lnTo>
+                    <a:pt x="4941954" y="0"/>
+                  </a:lnTo>
+                  <a:lnTo>
+                    <a:pt x="4870331" y="0"/>
+                  </a:lnTo>
+                  <a:lnTo>
+                    <a:pt x="4798709" y="0"/>
+                  </a:lnTo>
+                  <a:lnTo>
+                    <a:pt x="4727086" y="0"/>
+                  </a:lnTo>
+                  <a:lnTo>
+                    <a:pt x="4655464" y="0"/>
+                  </a:lnTo>
+                  <a:lnTo>
+                    <a:pt x="4583841" y="0"/>
+                  </a:lnTo>
+                  <a:lnTo>
+                    <a:pt x="4512219" y="0"/>
+                  </a:lnTo>
+                  <a:lnTo>
+                    <a:pt x="4440596" y="0"/>
+                  </a:lnTo>
+                  <a:lnTo>
+                    <a:pt x="4368974" y="0"/>
+                  </a:lnTo>
+                  <a:lnTo>
+                    <a:pt x="4297351" y="0"/>
+                  </a:lnTo>
+                  <a:lnTo>
+                    <a:pt x="4225729" y="0"/>
+                  </a:lnTo>
+                  <a:lnTo>
+                    <a:pt x="4154106" y="0"/>
+                  </a:lnTo>
+                  <a:lnTo>
+                    <a:pt x="4082483" y="0"/>
+                  </a:lnTo>
+                  <a:lnTo>
+                    <a:pt x="4010861" y="0"/>
+                  </a:lnTo>
+                  <a:lnTo>
+                    <a:pt x="3939238" y="0"/>
+                  </a:lnTo>
+                  <a:lnTo>
+                    <a:pt x="3867616" y="0"/>
+                  </a:lnTo>
+                  <a:lnTo>
+                    <a:pt x="3795993" y="0"/>
+                  </a:lnTo>
+                  <a:lnTo>
+                    <a:pt x="3724371" y="0"/>
+                  </a:lnTo>
+                  <a:lnTo>
+                    <a:pt x="3652748" y="0"/>
+                  </a:lnTo>
+                  <a:lnTo>
+                    <a:pt x="3581126" y="0"/>
+                  </a:lnTo>
+                  <a:lnTo>
+                    <a:pt x="3509503" y="0"/>
+                  </a:lnTo>
+                  <a:lnTo>
+                    <a:pt x="3437881" y="0"/>
+                  </a:lnTo>
+                  <a:lnTo>
+                    <a:pt x="3366258" y="0"/>
+                  </a:lnTo>
+                  <a:lnTo>
+                    <a:pt x="3294636" y="0"/>
+                  </a:lnTo>
+                  <a:lnTo>
+                    <a:pt x="3223013" y="0"/>
                   </a:lnTo>
                   <a:lnTo>
                     <a:pt x="3151391" y="0"/>
                   </a:lnTo>
                   <a:lnTo>
-                    <a:pt x="3079768" y="1"/>
-                  </a:lnTo>
-                  <a:lnTo>
-                    <a:pt x="3008146" y="1"/>
-                  </a:lnTo>
-                  <a:lnTo>
-                    <a:pt x="2936523" y="1"/>
-                  </a:lnTo>
-                  <a:lnTo>
-                    <a:pt x="2864901" y="1"/>
-                  </a:lnTo>
-                  <a:lnTo>
-                    <a:pt x="2793278" y="1"/>
-                  </a:lnTo>
-                  <a:lnTo>
-                    <a:pt x="2721655" y="1"/>
-                  </a:lnTo>
-                  <a:lnTo>
-                    <a:pt x="2650033" y="1"/>
-                  </a:lnTo>
-                  <a:lnTo>
-                    <a:pt x="2578410" y="1"/>
-                  </a:lnTo>
-                  <a:lnTo>
-                    <a:pt x="2506788" y="1"/>
-                  </a:lnTo>
-                  <a:lnTo>
-                    <a:pt x="2435165" y="1"/>
-                  </a:lnTo>
-                  <a:lnTo>
-                    <a:pt x="2363543" y="1"/>
-                  </a:lnTo>
-                  <a:lnTo>
-                    <a:pt x="2291920" y="1"/>
-                  </a:lnTo>
-                  <a:lnTo>
-                    <a:pt x="2220298" y="1"/>
-                  </a:lnTo>
-                  <a:lnTo>
-                    <a:pt x="2148675" y="1"/>
-                  </a:lnTo>
-                  <a:lnTo>
-                    <a:pt x="2077053" y="1"/>
-                  </a:lnTo>
-                  <a:lnTo>
-                    <a:pt x="2005430" y="1"/>
-                  </a:lnTo>
-                  <a:lnTo>
-                    <a:pt x="1933808" y="1"/>
-                  </a:lnTo>
-                  <a:lnTo>
-                    <a:pt x="1862185" y="1"/>
-                  </a:lnTo>
-                  <a:lnTo>
-                    <a:pt x="1790563" y="1"/>
-                  </a:lnTo>
-                  <a:lnTo>
-                    <a:pt x="1718940" y="1"/>
-                  </a:lnTo>
-                  <a:lnTo>
-                    <a:pt x="1647318" y="1"/>
-                  </a:lnTo>
-                  <a:lnTo>
-                    <a:pt x="1575695" y="1"/>
-                  </a:lnTo>
-                  <a:lnTo>
-                    <a:pt x="1504073" y="1"/>
-                  </a:lnTo>
-                  <a:lnTo>
-                    <a:pt x="1432450" y="1"/>
-                  </a:lnTo>
-                  <a:lnTo>
-                    <a:pt x="1360827" y="1"/>
-                  </a:lnTo>
-                  <a:lnTo>
-                    <a:pt x="1289205" y="1"/>
-                  </a:lnTo>
-                  <a:lnTo>
-                    <a:pt x="1217582" y="1"/>
-                  </a:lnTo>
-                  <a:lnTo>
-                    <a:pt x="1145960" y="1"/>
-                  </a:lnTo>
-                  <a:lnTo>
-                    <a:pt x="1074337" y="1"/>
-                  </a:lnTo>
-                  <a:lnTo>
-                    <a:pt x="1002715" y="1"/>
-                  </a:lnTo>
-                  <a:lnTo>
-                    <a:pt x="931092" y="1"/>
-                  </a:lnTo>
-                  <a:lnTo>
-                    <a:pt x="859470" y="1"/>
-                  </a:lnTo>
-                  <a:lnTo>
-                    <a:pt x="787847" y="1"/>
-                  </a:lnTo>
-                  <a:lnTo>
-                    <a:pt x="716225" y="1"/>
-                  </a:lnTo>
-                  <a:lnTo>
-                    <a:pt x="644602" y="1"/>
-                  </a:lnTo>
-                  <a:lnTo>
-                    <a:pt x="572980" y="1"/>
-                  </a:lnTo>
-                  <a:lnTo>
-                    <a:pt x="501357" y="1"/>
-                  </a:lnTo>
-                  <a:lnTo>
-                    <a:pt x="429735" y="1"/>
-                  </a:lnTo>
-                  <a:lnTo>
-                    <a:pt x="358112" y="1"/>
-                  </a:lnTo>
-                  <a:lnTo>
-                    <a:pt x="286490" y="1"/>
-                  </a:lnTo>
-                  <a:lnTo>
-                    <a:pt x="214867" y="1"/>
-                  </a:lnTo>
-                  <a:lnTo>
-                    <a:pt x="143245" y="1"/>
-                  </a:lnTo>
-                  <a:lnTo>
-                    <a:pt x="71622" y="1"/>
-                  </a:lnTo>
-                  <a:lnTo>
-                    <a:pt x="0" y="1"/>
+                    <a:pt x="3079768" y="0"/>
+                  </a:lnTo>
+                  <a:lnTo>
+                    <a:pt x="3008146" y="0"/>
+                  </a:lnTo>
+                  <a:lnTo>
+                    <a:pt x="2936523" y="0"/>
+                  </a:lnTo>
+                  <a:lnTo>
+                    <a:pt x="2864901" y="0"/>
+                  </a:lnTo>
+                  <a:lnTo>
+                    <a:pt x="2793278" y="0"/>
+                  </a:lnTo>
+                  <a:lnTo>
+                    <a:pt x="2721655" y="0"/>
+                  </a:lnTo>
+                  <a:lnTo>
+                    <a:pt x="2650033" y="0"/>
+                  </a:lnTo>
+                  <a:lnTo>
+                    <a:pt x="2578410" y="0"/>
+                  </a:lnTo>
+                  <a:lnTo>
+                    <a:pt x="2506788" y="0"/>
+                  </a:lnTo>
+                  <a:lnTo>
+                    <a:pt x="2435165" y="0"/>
+                  </a:lnTo>
+                  <a:lnTo>
+                    <a:pt x="2363543" y="0"/>
+                  </a:lnTo>
+                  <a:lnTo>
+                    <a:pt x="2291920" y="0"/>
+                  </a:lnTo>
+                  <a:lnTo>
+                    <a:pt x="2220298" y="0"/>
+                  </a:lnTo>
+                  <a:lnTo>
+                    <a:pt x="2148675" y="0"/>
+                  </a:lnTo>
+                  <a:lnTo>
+                    <a:pt x="2077053" y="0"/>
+                  </a:lnTo>
+                  <a:lnTo>
+                    <a:pt x="2005430" y="0"/>
+                  </a:lnTo>
+                  <a:lnTo>
+                    <a:pt x="1933808" y="0"/>
+                  </a:lnTo>
+                  <a:lnTo>
+                    <a:pt x="1862185" y="0"/>
+                  </a:lnTo>
+                  <a:lnTo>
+                    <a:pt x="1790563" y="0"/>
+                  </a:lnTo>
+                  <a:lnTo>
+                    <a:pt x="1718940" y="0"/>
+                  </a:lnTo>
+                  <a:lnTo>
+                    <a:pt x="1647318" y="0"/>
+                  </a:lnTo>
+                  <a:lnTo>
+                    <a:pt x="1575695" y="0"/>
+                  </a:lnTo>
+                  <a:lnTo>
+                    <a:pt x="1504073" y="0"/>
+                  </a:lnTo>
+                  <a:lnTo>
+                    <a:pt x="1432450" y="0"/>
+                  </a:lnTo>
+                  <a:lnTo>
+                    <a:pt x="1360827" y="0"/>
+                  </a:lnTo>
+                  <a:lnTo>
+                    <a:pt x="1289205" y="0"/>
+                  </a:lnTo>
+                  <a:lnTo>
+                    <a:pt x="1217582" y="0"/>
+                  </a:lnTo>
+                  <a:lnTo>
+                    <a:pt x="1145960" y="0"/>
+                  </a:lnTo>
+                  <a:lnTo>
+                    <a:pt x="1074337" y="0"/>
+                  </a:lnTo>
+                  <a:lnTo>
+                    <a:pt x="1002715" y="0"/>
+                  </a:lnTo>
+                  <a:lnTo>
+                    <a:pt x="931092" y="0"/>
+                  </a:lnTo>
+                  <a:lnTo>
+                    <a:pt x="859470" y="0"/>
+                  </a:lnTo>
+                  <a:lnTo>
+                    <a:pt x="787847" y="0"/>
+                  </a:lnTo>
+                  <a:lnTo>
+                    <a:pt x="716225" y="0"/>
+                  </a:lnTo>
+                  <a:lnTo>
+                    <a:pt x="644602" y="0"/>
+                  </a:lnTo>
+                  <a:lnTo>
+                    <a:pt x="572980" y="0"/>
+                  </a:lnTo>
+                  <a:lnTo>
+                    <a:pt x="501357" y="0"/>
+                  </a:lnTo>
+                  <a:lnTo>
+                    <a:pt x="429735" y="0"/>
+                  </a:lnTo>
+                  <a:lnTo>
+                    <a:pt x="358112" y="0"/>
+                  </a:lnTo>
+                  <a:lnTo>
+                    <a:pt x="286490" y="0"/>
+                  </a:lnTo>
+                  <a:lnTo>
+                    <a:pt x="214867" y="0"/>
+                  </a:lnTo>
+                  <a:lnTo>
+                    <a:pt x="143245" y="0"/>
+                  </a:lnTo>
+                  <a:lnTo>
+                    <a:pt x="71622" y="0"/>
+                  </a:lnTo>
+                  <a:lnTo>
+                    <a:pt x="0" y="0"/>
                   </a:lnTo>
                 </a:path>
               </a:pathLst>
@@ -4608,189 +4626,192 @@
           </p:nvSpPr>
           <p:spPr>
             <a:xfrm>
-              <a:off x="4113296" y="2073503"/>
-              <a:ext cx="4149383" cy="3483746"/>
+              <a:off x="4104553" y="2073503"/>
+              <a:ext cx="4158126" cy="3483746"/>
             </a:xfrm>
             <a:custGeom>
               <a:avLst/>
               <a:pathLst>
-                <a:path w="4149383" h="3483746">
+                <a:path w="4158126" h="3483746">
                   <a:moveTo>
                     <a:pt x="0" y="0"/>
                   </a:moveTo>
                   <a:lnTo>
-                    <a:pt x="66899" y="1336196"/>
-                  </a:lnTo>
-                  <a:lnTo>
-                    <a:pt x="138521" y="2194798"/>
-                  </a:lnTo>
-                  <a:lnTo>
-                    <a:pt x="210144" y="2710127"/>
-                  </a:lnTo>
-                  <a:lnTo>
-                    <a:pt x="281766" y="3019424"/>
-                  </a:lnTo>
-                  <a:lnTo>
-                    <a:pt x="353389" y="3205063"/>
-                  </a:lnTo>
-                  <a:lnTo>
-                    <a:pt x="425011" y="3316482"/>
-                  </a:lnTo>
-                  <a:lnTo>
-                    <a:pt x="496634" y="3383355"/>
-                  </a:lnTo>
-                  <a:lnTo>
-                    <a:pt x="568256" y="3423492"/>
-                  </a:lnTo>
-                  <a:lnTo>
-                    <a:pt x="639879" y="3447582"/>
-                  </a:lnTo>
-                  <a:lnTo>
-                    <a:pt x="711501" y="3462041"/>
-                  </a:lnTo>
-                  <a:lnTo>
-                    <a:pt x="783124" y="3470719"/>
-                  </a:lnTo>
-                  <a:lnTo>
-                    <a:pt x="854746" y="3475927"/>
-                  </a:lnTo>
-                  <a:lnTo>
-                    <a:pt x="926369" y="3479053"/>
-                  </a:lnTo>
-                  <a:lnTo>
-                    <a:pt x="997991" y="3480930"/>
-                  </a:lnTo>
-                  <a:lnTo>
-                    <a:pt x="1069614" y="3482056"/>
-                  </a:lnTo>
-                  <a:lnTo>
-                    <a:pt x="1141237" y="3482732"/>
-                  </a:lnTo>
-                  <a:lnTo>
-                    <a:pt x="1212859" y="3483137"/>
-                  </a:lnTo>
-                  <a:lnTo>
-                    <a:pt x="1284482" y="3483381"/>
-                  </a:lnTo>
-                  <a:lnTo>
-                    <a:pt x="1356104" y="3483527"/>
-                  </a:lnTo>
-                  <a:lnTo>
-                    <a:pt x="1427727" y="3483615"/>
-                  </a:lnTo>
-                  <a:lnTo>
-                    <a:pt x="1499349" y="3483667"/>
-                  </a:lnTo>
-                  <a:lnTo>
-                    <a:pt x="1570972" y="3483699"/>
-                  </a:lnTo>
-                  <a:lnTo>
-                    <a:pt x="1642594" y="3483718"/>
-                  </a:lnTo>
-                  <a:lnTo>
-                    <a:pt x="1714217" y="3483729"/>
-                  </a:lnTo>
-                  <a:lnTo>
-                    <a:pt x="1785839" y="3483736"/>
-                  </a:lnTo>
-                  <a:lnTo>
-                    <a:pt x="1857462" y="3483740"/>
-                  </a:lnTo>
-                  <a:lnTo>
-                    <a:pt x="1929084" y="3483743"/>
-                  </a:lnTo>
-                  <a:lnTo>
-                    <a:pt x="2000707" y="3483744"/>
-                  </a:lnTo>
-                  <a:lnTo>
-                    <a:pt x="2072329" y="3483745"/>
-                  </a:lnTo>
-                  <a:lnTo>
-                    <a:pt x="2143952" y="3483746"/>
-                  </a:lnTo>
-                  <a:lnTo>
-                    <a:pt x="2215574" y="3483746"/>
-                  </a:lnTo>
-                  <a:lnTo>
-                    <a:pt x="2287197" y="3483746"/>
-                  </a:lnTo>
-                  <a:lnTo>
-                    <a:pt x="2358819" y="3483746"/>
-                  </a:lnTo>
-                  <a:lnTo>
-                    <a:pt x="2430442" y="3483746"/>
-                  </a:lnTo>
-                  <a:lnTo>
-                    <a:pt x="2502064" y="3483746"/>
-                  </a:lnTo>
-                  <a:lnTo>
-                    <a:pt x="2573687" y="3483746"/>
-                  </a:lnTo>
-                  <a:lnTo>
-                    <a:pt x="2645310" y="3483746"/>
-                  </a:lnTo>
-                  <a:lnTo>
-                    <a:pt x="2716932" y="3483746"/>
-                  </a:lnTo>
-                  <a:lnTo>
-                    <a:pt x="2788555" y="3483746"/>
-                  </a:lnTo>
-                  <a:lnTo>
-                    <a:pt x="2860177" y="3483746"/>
-                  </a:lnTo>
-                  <a:lnTo>
-                    <a:pt x="2931800" y="3483746"/>
-                  </a:lnTo>
-                  <a:lnTo>
-                    <a:pt x="3003422" y="3483746"/>
-                  </a:lnTo>
-                  <a:lnTo>
-                    <a:pt x="3075045" y="3483746"/>
-                  </a:lnTo>
-                  <a:lnTo>
-                    <a:pt x="3146667" y="3483746"/>
-                  </a:lnTo>
-                  <a:lnTo>
-                    <a:pt x="3218290" y="3483746"/>
-                  </a:lnTo>
-                  <a:lnTo>
-                    <a:pt x="3289912" y="3483746"/>
-                  </a:lnTo>
-                  <a:lnTo>
-                    <a:pt x="3361535" y="3483746"/>
-                  </a:lnTo>
-                  <a:lnTo>
-                    <a:pt x="3433157" y="3483746"/>
-                  </a:lnTo>
-                  <a:lnTo>
-                    <a:pt x="3504780" y="3483746"/>
-                  </a:lnTo>
-                  <a:lnTo>
-                    <a:pt x="3576402" y="3483746"/>
-                  </a:lnTo>
-                  <a:lnTo>
-                    <a:pt x="3648025" y="3483746"/>
-                  </a:lnTo>
-                  <a:lnTo>
-                    <a:pt x="3719647" y="3483746"/>
-                  </a:lnTo>
-                  <a:lnTo>
-                    <a:pt x="3791270" y="3483746"/>
-                  </a:lnTo>
-                  <a:lnTo>
-                    <a:pt x="3862892" y="3483746"/>
-                  </a:lnTo>
-                  <a:lnTo>
-                    <a:pt x="3934515" y="3483746"/>
-                  </a:lnTo>
-                  <a:lnTo>
-                    <a:pt x="4006138" y="3483746"/>
-                  </a:lnTo>
-                  <a:lnTo>
-                    <a:pt x="4077760" y="3483746"/>
-                  </a:lnTo>
-                  <a:lnTo>
-                    <a:pt x="4149383" y="3483746"/>
+                    <a:pt x="4019" y="118926"/>
+                  </a:lnTo>
+                  <a:lnTo>
+                    <a:pt x="75642" y="1419145"/>
+                  </a:lnTo>
+                  <a:lnTo>
+                    <a:pt x="147264" y="2216939"/>
+                  </a:lnTo>
+                  <a:lnTo>
+                    <a:pt x="218887" y="2706453"/>
+                  </a:lnTo>
+                  <a:lnTo>
+                    <a:pt x="290509" y="3006811"/>
+                  </a:lnTo>
+                  <a:lnTo>
+                    <a:pt x="362132" y="3191107"/>
+                  </a:lnTo>
+                  <a:lnTo>
+                    <a:pt x="433754" y="3304187"/>
+                  </a:lnTo>
+                  <a:lnTo>
+                    <a:pt x="505377" y="3373572"/>
+                  </a:lnTo>
+                  <a:lnTo>
+                    <a:pt x="576999" y="3416145"/>
+                  </a:lnTo>
+                  <a:lnTo>
+                    <a:pt x="648622" y="3442267"/>
+                  </a:lnTo>
+                  <a:lnTo>
+                    <a:pt x="720244" y="3458295"/>
+                  </a:lnTo>
+                  <a:lnTo>
+                    <a:pt x="791867" y="3468130"/>
+                  </a:lnTo>
+                  <a:lnTo>
+                    <a:pt x="863489" y="3474164"/>
+                  </a:lnTo>
+                  <a:lnTo>
+                    <a:pt x="935112" y="3477867"/>
+                  </a:lnTo>
+                  <a:lnTo>
+                    <a:pt x="1006735" y="3480139"/>
+                  </a:lnTo>
+                  <a:lnTo>
+                    <a:pt x="1078357" y="3481533"/>
+                  </a:lnTo>
+                  <a:lnTo>
+                    <a:pt x="1149980" y="3482388"/>
+                  </a:lnTo>
+                  <a:lnTo>
+                    <a:pt x="1221602" y="3482913"/>
+                  </a:lnTo>
+                  <a:lnTo>
+                    <a:pt x="1293225" y="3483235"/>
+                  </a:lnTo>
+                  <a:lnTo>
+                    <a:pt x="1364847" y="3483433"/>
+                  </a:lnTo>
+                  <a:lnTo>
+                    <a:pt x="1436470" y="3483554"/>
+                  </a:lnTo>
+                  <a:lnTo>
+                    <a:pt x="1508092" y="3483628"/>
+                  </a:lnTo>
+                  <a:lnTo>
+                    <a:pt x="1579715" y="3483674"/>
+                  </a:lnTo>
+                  <a:lnTo>
+                    <a:pt x="1651337" y="3483702"/>
+                  </a:lnTo>
+                  <a:lnTo>
+                    <a:pt x="1722960" y="3483719"/>
+                  </a:lnTo>
+                  <a:lnTo>
+                    <a:pt x="1794582" y="3483730"/>
+                  </a:lnTo>
+                  <a:lnTo>
+                    <a:pt x="1866205" y="3483736"/>
+                  </a:lnTo>
+                  <a:lnTo>
+                    <a:pt x="1937827" y="3483740"/>
+                  </a:lnTo>
+                  <a:lnTo>
+                    <a:pt x="2009450" y="3483743"/>
+                  </a:lnTo>
+                  <a:lnTo>
+                    <a:pt x="2081072" y="3483744"/>
+                  </a:lnTo>
+                  <a:lnTo>
+                    <a:pt x="2152695" y="3483745"/>
+                  </a:lnTo>
+                  <a:lnTo>
+                    <a:pt x="2224317" y="3483746"/>
+                  </a:lnTo>
+                  <a:lnTo>
+                    <a:pt x="2295940" y="3483746"/>
+                  </a:lnTo>
+                  <a:lnTo>
+                    <a:pt x="2367563" y="3483746"/>
+                  </a:lnTo>
+                  <a:lnTo>
+                    <a:pt x="2439185" y="3483746"/>
+                  </a:lnTo>
+                  <a:lnTo>
+                    <a:pt x="2510808" y="3483746"/>
+                  </a:lnTo>
+                  <a:lnTo>
+                    <a:pt x="2582430" y="3483746"/>
+                  </a:lnTo>
+                  <a:lnTo>
+                    <a:pt x="2654053" y="3483746"/>
+                  </a:lnTo>
+                  <a:lnTo>
+                    <a:pt x="2725675" y="3483746"/>
+                  </a:lnTo>
+                  <a:lnTo>
+                    <a:pt x="2797298" y="3483746"/>
+                  </a:lnTo>
+                  <a:lnTo>
+                    <a:pt x="2868920" y="3483746"/>
+                  </a:lnTo>
+                  <a:lnTo>
+                    <a:pt x="2940543" y="3483746"/>
+                  </a:lnTo>
+                  <a:lnTo>
+                    <a:pt x="3012165" y="3483746"/>
+                  </a:lnTo>
+                  <a:lnTo>
+                    <a:pt x="3083788" y="3483746"/>
+                  </a:lnTo>
+                  <a:lnTo>
+                    <a:pt x="3155410" y="3483746"/>
+                  </a:lnTo>
+                  <a:lnTo>
+                    <a:pt x="3227033" y="3483746"/>
+                  </a:lnTo>
+                  <a:lnTo>
+                    <a:pt x="3298655" y="3483746"/>
+                  </a:lnTo>
+                  <a:lnTo>
+                    <a:pt x="3370278" y="3483746"/>
+                  </a:lnTo>
+                  <a:lnTo>
+                    <a:pt x="3441900" y="3483746"/>
+                  </a:lnTo>
+                  <a:lnTo>
+                    <a:pt x="3513523" y="3483746"/>
+                  </a:lnTo>
+                  <a:lnTo>
+                    <a:pt x="3585145" y="3483746"/>
+                  </a:lnTo>
+                  <a:lnTo>
+                    <a:pt x="3656768" y="3483746"/>
+                  </a:lnTo>
+                  <a:lnTo>
+                    <a:pt x="3728391" y="3483746"/>
+                  </a:lnTo>
+                  <a:lnTo>
+                    <a:pt x="3800013" y="3483746"/>
+                  </a:lnTo>
+                  <a:lnTo>
+                    <a:pt x="3871636" y="3483746"/>
+                  </a:lnTo>
+                  <a:lnTo>
+                    <a:pt x="3943258" y="3483746"/>
+                  </a:lnTo>
+                  <a:lnTo>
+                    <a:pt x="4014881" y="3483746"/>
+                  </a:lnTo>
+                  <a:lnTo>
+                    <a:pt x="4086503" y="3483746"/>
+                  </a:lnTo>
+                  <a:lnTo>
+                    <a:pt x="4158126" y="3483746"/>
                   </a:lnTo>
                 </a:path>
               </a:pathLst>
@@ -4862,7 +4883,7 @@
           </p:nvSpPr>
           <p:spPr>
             <a:xfrm>
-              <a:off x="4313661" y="2073503"/>
+              <a:off x="4313914" y="2073503"/>
               <a:ext cx="0" cy="3649639"/>
             </a:xfrm>
             <a:custGeom>
@@ -5135,7 +5156,7 @@
           </p:nvSpPr>
           <p:spPr>
             <a:xfrm>
-              <a:off x="1343342" y="5785772"/>
+              <a:off x="1344940" y="5785772"/>
               <a:ext cx="161574" cy="80101"/>
             </a:xfrm>
             <a:prstGeom prst="rect">
@@ -5181,7 +5202,7 @@
           </p:nvSpPr>
           <p:spPr>
             <a:xfrm>
-              <a:off x="2280620" y="5785772"/>
+              <a:off x="2281218" y="5785772"/>
               <a:ext cx="161574" cy="80101"/>
             </a:xfrm>
             <a:prstGeom prst="rect">
@@ -5227,7 +5248,7 @@
           </p:nvSpPr>
           <p:spPr>
             <a:xfrm>
-              <a:off x="3217897" y="5785772"/>
+              <a:off x="3217496" y="5785772"/>
               <a:ext cx="161574" cy="80101"/>
             </a:xfrm>
             <a:prstGeom prst="rect">
@@ -5273,7 +5294,7 @@
           </p:nvSpPr>
           <p:spPr>
             <a:xfrm>
-              <a:off x="4204872" y="5785772"/>
+              <a:off x="4203472" y="5785772"/>
               <a:ext cx="62179" cy="80101"/>
             </a:xfrm>
             <a:prstGeom prst="rect">
@@ -5319,7 +5340,7 @@
           </p:nvSpPr>
           <p:spPr>
             <a:xfrm>
-              <a:off x="5111060" y="5785772"/>
+              <a:off x="5108660" y="5785772"/>
               <a:ext cx="124358" cy="80101"/>
             </a:xfrm>
             <a:prstGeom prst="rect">
@@ -5365,7 +5386,7 @@
           </p:nvSpPr>
           <p:spPr>
             <a:xfrm>
-              <a:off x="6048338" y="5785772"/>
+              <a:off x="6044938" y="5785772"/>
               <a:ext cx="124358" cy="80101"/>
             </a:xfrm>
             <a:prstGeom prst="rect">
@@ -5411,7 +5432,7 @@
           </p:nvSpPr>
           <p:spPr>
             <a:xfrm>
-              <a:off x="6985615" y="5785772"/>
+              <a:off x="6981216" y="5785772"/>
               <a:ext cx="124358" cy="80101"/>
             </a:xfrm>
             <a:prstGeom prst="rect">
@@ -5457,7 +5478,7 @@
           </p:nvSpPr>
           <p:spPr>
             <a:xfrm>
-              <a:off x="7922893" y="5785772"/>
+              <a:off x="7917494" y="5785772"/>
               <a:ext cx="124358" cy="80101"/>
             </a:xfrm>
             <a:prstGeom prst="rect">
@@ -5628,7 +5649,7 @@
                   <a:latin typeface="Helvetica"/>
                   <a:cs typeface="Helvetica"/>
                 </a:rPr>
-                <a:t>HR per 10 % decline: 796.80 (0.00-Inf), p_Bonf = 1.000 (n = 6)  |  per IQR decline (Δ = 25.8 %): 31311763.93 (0.00-Inf)  |  IQR: [-10.7, 15.1] %</a:t>
+                <a:t>HR per 10 % decline: 592.91 (0.00-Inf), p_Bonf = 1.000 (n = 6)  |  per IQR decline (Δ = 25.8 %): 14317937.60 (0.00-Inf)  |  IQR: [-10.6, 15.2] %</a:t>
               </a:r>
             </a:p>
           </p:txBody>
